--- a/docs/proposals/final/提案書_LOTTE×TSUBURAYA_統合版_2026-08.pptx
+++ b/docs/proposals/final/提案書_LOTTE×TSUBURAYA_統合版_2026-08.pptx
@@ -877,7 +877,7 @@
           <a:p>
             <a:r>
               <a:rPr lang="en-US" dirty="0"/>
-              <a:t>ここで初めてULTRA 3MIN.を出す。「実現できます」とは絶対に言わない。「御社の研究部門と検証したい仮説」で通す。</a:t>
+              <a:t>ここで初めてULTRA 3MIN.を出す。主軸は「3分で気分が変わる」（キリッとする・落ち着く）。味や色の変化は検証仮説として添える程度に。形態はグミ第一候補（ロッテのグミシフトと整合）。「実現できます」とは絶対に言わない。</a:t>
             </a:r>
             <a:endParaRPr lang="en-US" dirty="0"/>
           </a:p>
@@ -8457,7 +8457,7 @@
                 <a:ea typeface="游ゴシック" pitchFamily="34" charset="-122"/>
                 <a:cs typeface="游ゴシック" pitchFamily="34" charset="-120"/>
               </a:rPr>
-              <a:t>実証の先で共同開発したい最終構想 ──『ULTRA 3MIN.』。ウルトラマンの「変身」「3分間」「カラータイマー」を、食体験に翻訳する</a:t>
+              <a:t>実証の先で共同開発したい最終構想 ──『ULTRA 3MIN.』。ウルトラマンの「3分間」を、気分を切り替える食習慣に翻訳する</a:t>
             </a:r>
             <a:endParaRPr lang="en-US" sz="1250" dirty="0"/>
           </a:p>
@@ -8611,7 +8611,7 @@
                 <a:ea typeface="游ゴシック" pitchFamily="34" charset="-122"/>
                 <a:cs typeface="游ゴシック" pitchFamily="34" charset="-120"/>
               </a:rPr>
-              <a:t>コンセプト（技術検証したい仮説）</a:t>
+              <a:t>コンセプト（共同で検証したい仮説）</a:t>
             </a:r>
             <a:endParaRPr lang="en-US" sz="1200" dirty="0"/>
           </a:p>
@@ -8696,7 +8696,7 @@
                 <a:ea typeface="游ゴシック" pitchFamily="34" charset="-122"/>
                 <a:cs typeface="游ゴシック" pitchFamily="34" charset="-120"/>
               </a:rPr>
-              <a:t>味と色が、変身する。</a:t>
+              <a:t>気分が、変身する。</a:t>
             </a:r>
             <a:endParaRPr lang="en-US" sz="2200" dirty="0"/>
           </a:p>
@@ -8711,7 +8711,7 @@
         <p:spPr>
           <a:xfrm>
             <a:off x="685800" y="3931920"/>
-            <a:ext cx="4937760" cy="1005840"/>
+            <a:ext cx="4937760" cy="1051560"/>
           </a:xfrm>
           <a:prstGeom prst="rect">
             <a:avLst/>
@@ -8738,7 +8738,7 @@
                 <a:ea typeface="游ゴシック" pitchFamily="34" charset="-122"/>
                 <a:cs typeface="游ゴシック" pitchFamily="34" charset="-120"/>
               </a:rPr>
-              <a:t>勉強前・仕事前の「1日3分のヒーロータイム」という新習慣。</a:t>
+              <a:t>「やるぞ」のスイッチ、「落ち着く」の儀式 ── 勉強前・仕事前の</a:t>
             </a:r>
             <a:endParaRPr lang="en-US" sz="1100" dirty="0"/>
           </a:p>
@@ -8758,7 +8758,7 @@
                 <a:ea typeface="游ゴシック" pitchFamily="34" charset="-122"/>
                 <a:cs typeface="游ゴシック" pitchFamily="34" charset="-120"/>
               </a:rPr>
-              <a:t>収集シール・デジタル図鑑と連動し、コアラのマーチ実証で</a:t>
+              <a:t>「1日3分のヒーロータイム」という新習慣。形態はグミを第一候補に</a:t>
             </a:r>
             <a:endParaRPr lang="en-US" sz="1100" dirty="0"/>
           </a:p>
@@ -8778,7 +8778,7 @@
                 <a:ea typeface="游ゴシック" pitchFamily="34" charset="-122"/>
                 <a:cs typeface="游ゴシック" pitchFamily="34" charset="-120"/>
               </a:rPr>
-              <a:t>学んだ収集エンジンをそのまま引き継ぐ</a:t>
+              <a:t>（御社のグミ強化・生産投資の方針と整合）、ガム等へ拡張</a:t>
             </a:r>
             <a:endParaRPr lang="en-US" sz="1100" dirty="0"/>
           </a:p>
@@ -8817,7 +8817,7 @@
                 <a:ea typeface="游ゴシック" pitchFamily="34" charset="-122"/>
                 <a:cs typeface="游ゴシック" pitchFamily="34" charset="-120"/>
               </a:rPr>
-              <a:t>変身の設計（イメージ）</a:t>
+              <a:t>3分の変身の設計（イメージ）</a:t>
             </a:r>
             <a:endParaRPr lang="en-US" sz="1200" dirty="0"/>
           </a:p>
@@ -8869,9 +8869,9 @@
             <a:tbl>
               <a:tblPr/>
               <a:tblGrid>
-                <a:gridCol w="1124712"/>
-                <a:gridCol w="2194560"/>
-                <a:gridCol w="2194560"/>
+                <a:gridCol w="1280160"/>
+                <a:gridCol w="1920240"/>
+                <a:gridCol w="2313432"/>
               </a:tblGrid>
               <a:tr h="347472">
                 <a:tc>
@@ -8882,7 +8882,7 @@
                       <a:pPr indent="0" marL="0">
                         <a:buNone/>
                       </a:pPr>
-                      <a:endParaRPr lang="en-US" sz="1050" dirty="0">
+                      <a:endParaRPr lang="en-US" sz="1000" dirty="0">
                         <a:latin typeface="游ゴシック" charset="0"/>
                         <a:ea typeface="游ゴシック" charset="0"/>
                         <a:cs typeface="游ゴシック" charset="0"/>
@@ -8940,7 +8940,7 @@
                         <a:buNone/>
                       </a:pPr>
                       <a:r>
-                        <a:rPr lang="en-US" sz="1050" b="1" dirty="0">
+                        <a:rPr lang="en-US" sz="1000" b="1" dirty="0">
                           <a:solidFill>
                             <a:srgbClr val="FFFFFF"/>
                           </a:solidFill>
@@ -8948,9 +8948,9 @@
                           <a:ea typeface="游ゴシック" pitchFamily="34" charset="-122"/>
                           <a:cs typeface="游ゴシック" pitchFamily="34" charset="-120"/>
                         </a:rPr>
-                        <a:t>第1形態</a:t>
+                        <a:t>噛みはじめ</a:t>
                       </a:r>
-                      <a:endParaRPr lang="en-US" sz="1050" dirty="0">
+                      <a:endParaRPr lang="en-US" sz="1000" dirty="0">
                         <a:latin typeface="游ゴシック" charset="0"/>
                         <a:ea typeface="游ゴシック" charset="0"/>
                         <a:cs typeface="游ゴシック" charset="0"/>
@@ -9008,7 +9008,7 @@
                         <a:buNone/>
                       </a:pPr>
                       <a:r>
-                        <a:rPr lang="en-US" sz="1050" b="1" dirty="0">
+                        <a:rPr lang="en-US" sz="1000" b="1" dirty="0">
                           <a:solidFill>
                             <a:srgbClr val="FFFFFF"/>
                           </a:solidFill>
@@ -9018,7 +9018,7 @@
                         </a:rPr>
                         <a:t>変身（3分経過）</a:t>
                       </a:r>
-                      <a:endParaRPr lang="en-US" sz="1050" dirty="0">
+                      <a:endParaRPr lang="en-US" sz="1000" dirty="0">
                         <a:latin typeface="游ゴシック" charset="0"/>
                         <a:ea typeface="游ゴシック" charset="0"/>
                         <a:cs typeface="游ゴシック" charset="0"/>
@@ -9078,7 +9078,7 @@
                         <a:buNone/>
                       </a:pPr>
                       <a:r>
-                        <a:rPr lang="en-US" sz="1050" b="1" dirty="0">
+                        <a:rPr lang="en-US" sz="1000" b="1" dirty="0">
                           <a:solidFill>
                             <a:srgbClr val="333333"/>
                           </a:solidFill>
@@ -9086,9 +9086,9 @@
                           <a:ea typeface="游ゴシック" pitchFamily="34" charset="-122"/>
                           <a:cs typeface="游ゴシック" pitchFamily="34" charset="-120"/>
                         </a:rPr>
-                        <a:t>色</a:t>
+                        <a:t>気分</a:t>
                       </a:r>
-                      <a:endParaRPr lang="en-US" sz="1050" dirty="0">
+                      <a:endParaRPr lang="en-US" sz="1000" dirty="0">
                         <a:latin typeface="游ゴシック" charset="0"/>
                         <a:ea typeface="游ゴシック" charset="0"/>
                         <a:cs typeface="游ゴシック" charset="0"/>
@@ -9146,7 +9146,7 @@
                         <a:buNone/>
                       </a:pPr>
                       <a:r>
-                        <a:rPr lang="en-US" sz="1050" dirty="0">
+                        <a:rPr lang="en-US" sz="1000" dirty="0">
                           <a:solidFill>
                             <a:srgbClr val="404040"/>
                           </a:solidFill>
@@ -9154,9 +9154,9 @@
                           <a:ea typeface="游ゴシック" pitchFamily="34" charset="-122"/>
                           <a:cs typeface="游ゴシック" pitchFamily="34" charset="-120"/>
                         </a:rPr>
-                        <a:t>スカイブルー</a:t>
+                        <a:t>ざわつく日常</a:t>
                       </a:r>
-                      <a:endParaRPr lang="en-US" sz="1050" dirty="0">
+                      <a:endParaRPr lang="en-US" sz="1000" dirty="0">
                         <a:latin typeface="游ゴシック" charset="0"/>
                         <a:ea typeface="游ゴシック" charset="0"/>
                         <a:cs typeface="游ゴシック" charset="0"/>
@@ -9211,7 +9211,7 @@
                         <a:buNone/>
                       </a:pPr>
                       <a:r>
-                        <a:rPr lang="en-US" sz="1050" b="1" dirty="0">
+                        <a:rPr lang="en-US" sz="1000" b="1" dirty="0">
                           <a:solidFill>
                             <a:srgbClr val="C00000"/>
                           </a:solidFill>
@@ -9219,9 +9219,9 @@
                           <a:ea typeface="游ゴシック" pitchFamily="34" charset="-122"/>
                           <a:cs typeface="游ゴシック" pitchFamily="34" charset="-120"/>
                         </a:rPr>
-                        <a:t>バーニングレッド</a:t>
+                        <a:t>キリッと集中／すっと落ち着く</a:t>
                       </a:r>
-                      <a:endParaRPr lang="en-US" sz="1050" dirty="0">
+                      <a:endParaRPr lang="en-US" sz="1000" dirty="0">
                         <a:latin typeface="游ゴシック" charset="0"/>
                         <a:ea typeface="游ゴシック" charset="0"/>
                         <a:cs typeface="游ゴシック" charset="0"/>
@@ -9278,7 +9278,7 @@
                         <a:buNone/>
                       </a:pPr>
                       <a:r>
-                        <a:rPr lang="en-US" sz="1050" b="1" dirty="0">
+                        <a:rPr lang="en-US" sz="1000" b="1" dirty="0">
                           <a:solidFill>
                             <a:srgbClr val="333333"/>
                           </a:solidFill>
@@ -9286,9 +9286,9 @@
                           <a:ea typeface="游ゴシック" pitchFamily="34" charset="-122"/>
                           <a:cs typeface="游ゴシック" pitchFamily="34" charset="-120"/>
                         </a:rPr>
-                        <a:t>味</a:t>
+                        <a:t>味・清涼感</a:t>
                       </a:r>
-                      <a:endParaRPr lang="en-US" sz="1050" dirty="0">
+                      <a:endParaRPr lang="en-US" sz="1000" dirty="0">
                         <a:latin typeface="游ゴシック" charset="0"/>
                         <a:ea typeface="游ゴシック" charset="0"/>
                         <a:cs typeface="游ゴシック" charset="0"/>
@@ -9346,7 +9346,7 @@
                         <a:buNone/>
                       </a:pPr>
                       <a:r>
-                        <a:rPr lang="en-US" sz="1050" dirty="0">
+                        <a:rPr lang="en-US" sz="1000" dirty="0">
                           <a:solidFill>
                             <a:srgbClr val="404040"/>
                           </a:solidFill>
@@ -9354,9 +9354,9 @@
                           <a:ea typeface="游ゴシック" pitchFamily="34" charset="-122"/>
                           <a:cs typeface="游ゴシック" pitchFamily="34" charset="-120"/>
                         </a:rPr>
-                        <a:t>クールソーダ</a:t>
+                        <a:t>クールな立ち上がり</a:t>
                       </a:r>
-                      <a:endParaRPr lang="en-US" sz="1050" dirty="0">
+                      <a:endParaRPr lang="en-US" sz="1000" dirty="0">
                         <a:latin typeface="游ゴシック" charset="0"/>
                         <a:ea typeface="游ゴシック" charset="0"/>
                         <a:cs typeface="游ゴシック" charset="0"/>
@@ -9411,17 +9411,17 @@
                         <a:buNone/>
                       </a:pPr>
                       <a:r>
-                        <a:rPr lang="en-US" sz="1050" b="1" dirty="0">
+                        <a:rPr lang="en-US" sz="1000" dirty="0">
                           <a:solidFill>
-                            <a:srgbClr val="C00000"/>
+                            <a:srgbClr val="404040"/>
                           </a:solidFill>
                           <a:latin typeface="游ゴシック" pitchFamily="34" charset="0"/>
                           <a:ea typeface="游ゴシック" pitchFamily="34" charset="-122"/>
                           <a:cs typeface="游ゴシック" pitchFamily="34" charset="-120"/>
                         </a:rPr>
-                        <a:t>エナジーフレーバー</a:t>
+                        <a:t>時限的な変化（検証仮説）</a:t>
                       </a:r>
-                      <a:endParaRPr lang="en-US" sz="1050" dirty="0">
+                      <a:endParaRPr lang="en-US" sz="1000" dirty="0">
                         <a:latin typeface="游ゴシック" charset="0"/>
                         <a:ea typeface="游ゴシック" charset="0"/>
                         <a:cs typeface="游ゴシック" charset="0"/>
@@ -9480,8 +9480,8 @@
         </p:nvSpPr>
         <p:spPr>
           <a:xfrm>
-            <a:off x="9253728" y="2679192"/>
-            <a:ext cx="2304288" cy="1399032"/>
+            <a:off x="7214616" y="3026664"/>
+            <a:ext cx="4343400" cy="521208"/>
           </a:xfrm>
           <a:prstGeom prst="rect">
             <a:avLst/>
@@ -9503,7 +9503,7 @@
         <p:spPr>
           <a:xfrm>
             <a:off x="5989320" y="4251960"/>
-            <a:ext cx="5513832" cy="685800"/>
+            <a:ext cx="5513832" cy="822960"/>
           </a:xfrm>
           <a:prstGeom prst="rect">
             <a:avLst/>
@@ -9547,7 +9547,7 @@
                 <a:ea typeface="游ゴシック" pitchFamily="34" charset="-122"/>
                 <a:cs typeface="游ゴシック" pitchFamily="34" charset="-120"/>
               </a:rPr>
-              <a:t>時限的な味・色変化は、御社の咀嚼研究・商品開発・研究部門と共同で技術検証したい仮説であり、実現可能性を保証するものではない</a:t>
+              <a:t>「3分後の気分の切り替え」を軸に、香味・清涼感・食感等の時限設計は御社の咀嚼研究・商品開発・研究部門と共同で技術検証したい仮説（実現可能性を保証するものではない）</a:t>
             </a:r>
             <a:endParaRPr lang="en-US" sz="950" dirty="0"/>
           </a:p>
@@ -9622,7 +9622,7 @@
                 <a:ea typeface="游ゴシック" pitchFamily="34" charset="-122"/>
                 <a:cs typeface="游ゴシック" pitchFamily="34" charset="-120"/>
               </a:rPr>
-              <a:t>「3分間の時限変化」を物語として背負えるのは、カラータイマーを持つウルトラマンだけ。変身の瞬間ではなく、3分間を売る</a:t>
+              <a:t>「3分」を物語として背負えるのは、カラータイマーを持つウルトラマンだけ。噛むことの価値（集中・リフレッシュ）は御社の咀嚼研究と整合する</a:t>
             </a:r>
             <a:endParaRPr lang="en-US" sz="1100" dirty="0"/>
           </a:p>
@@ -27338,7 +27338,7 @@
                 <a:ea typeface="游ゴシック" pitchFamily="34" charset="-122"/>
                 <a:cs typeface="游ゴシック" pitchFamily="34" charset="-120"/>
               </a:rPr>
-              <a:t>出所：アライドアーキテクツ社 VOC分析（X上の生活者投稿、2025/8–2026/7）スコアの算出方法はP.20参照</a:t>
+              <a:t>スコア＝競合比の相対値（0が基準・正＝競合より強く独占）。出所：アライドアーキテクツ社 VOC分析（X上の生活者投稿、2025/8–2026/7）スコアの算出方法はP.20参照</a:t>
             </a:r>
             <a:endParaRPr lang="en-US" sz="900" dirty="0"/>
           </a:p>
@@ -31622,7 +31622,7 @@
                 <a:ea typeface="游ゴシック" pitchFamily="34" charset="-122"/>
                 <a:cs typeface="游ゴシック" pitchFamily="34" charset="-120"/>
               </a:rPr>
-              <a:t>出所：アライドアーキテクツ社 VOC分析（X上の生活者投稿、2025/8–2026/7）スコアの算出方法はP.20参照</a:t>
+              <a:t>スコア＝競合比の相対値（0が基準・正＝競合より強く独占）。出所：アライドアーキテクツ社 VOC分析（X上の生活者投稿、2025/8–2026/7）スコアの算出方法はP.20参照</a:t>
             </a:r>
             <a:endParaRPr lang="en-US" sz="900" dirty="0"/>
           </a:p>
@@ -32076,7 +32076,7 @@
                 <a:ea typeface="游ゴシック" pitchFamily="34" charset="-122"/>
                 <a:cs typeface="游ゴシック" pitchFamily="34" charset="-120"/>
               </a:rPr>
-              <a:t>時限的な味変化（約3分）：フレーバーカプセルの徐放設計 ── 要検証</a:t>
+              <a:t>「3分後の気分の切り替え」体験の設計：清涼感・香味の立ち上がり制御 ── 要検証</a:t>
             </a:r>
             <a:endParaRPr lang="en-US" sz="1050" dirty="0"/>
           </a:p>
@@ -32100,7 +32100,7 @@
                 <a:ea typeface="游ゴシック" pitchFamily="34" charset="-122"/>
                 <a:cs typeface="游ゴシック" pitchFamily="34" charset="-120"/>
               </a:rPr>
-              <a:t>時限的な色変化：食用色素の反応設計・安全性 ── 要検証</a:t>
+              <a:t>時限的な味・色の変化（フレーバーカプセル徐放・食用色素）── 検証仮説の一つ</a:t>
             </a:r>
             <a:endParaRPr lang="en-US" sz="1050" dirty="0"/>
           </a:p>
@@ -32124,7 +32124,7 @@
                 <a:ea typeface="游ゴシック" pitchFamily="34" charset="-122"/>
                 <a:cs typeface="游ゴシック" pitchFamily="34" charset="-120"/>
               </a:rPr>
-              <a:t>ガム／グミ両形態での実装可否と食感設計 ── 要検証</a:t>
+              <a:t>形態はグミを第一候補（御社のグミ強化・生産投資の方針と整合）、ガム等へ拡張 ── 実装可否・食感設計は要検証</a:t>
             </a:r>
             <a:endParaRPr lang="en-US" sz="1050" dirty="0"/>
           </a:p>
@@ -35639,7 +35639,7 @@
                 <a:ea typeface="游ゴシック" pitchFamily="34" charset="-122"/>
                 <a:cs typeface="游ゴシック" pitchFamily="34" charset="-120"/>
               </a:rPr>
-              <a:t>出所：アライドアーキテクツ社 VOC分析（X上の生活者投稿、2025/8–2026/7）※分析の一部を抜粋。手法・全データはAppendix参照</a:t>
+              <a:t>スコア＝競合比の相対値（0が基準・正＝競合より強く独占）。出所：アライドアーキテクツ社 VOC分析（X上の生活者投稿、2025/8–2026/7）※分析の一部を抜粋。手法・全データはAppendix参照</a:t>
             </a:r>
             <a:endParaRPr lang="en-US" sz="900" dirty="0"/>
           </a:p>
@@ -37398,7 +37398,7 @@
                 <a:ea typeface="游ゴシック" pitchFamily="34" charset="-122"/>
                 <a:cs typeface="游ゴシック" pitchFamily="34" charset="-120"/>
               </a:rPr>
-              <a:t>出所：アライドアーキテクツ社 VOC分析（各界隈の言及件数は2,000件中、YoYは前年同期比）</a:t>
+              <a:t>出所：アライドアーキテクツ社 VOC分析。言及件数は各界隈2,000件中／YoY＝ウルトラマン関連発話における当該文脈の発話数の前年比（2024年→2025年）</a:t>
             </a:r>
             <a:endParaRPr lang="en-US" sz="900" dirty="0"/>
           </a:p>
@@ -42531,7 +42531,7 @@
                 <a:ea typeface="游ゴシック" pitchFamily="34" charset="-122"/>
                 <a:cs typeface="游ゴシック" pitchFamily="34" charset="-120"/>
               </a:rPr>
-              <a:t>出所：アライドアーキテクツ社 VOC分析（X上の生活者投稿、2025/8–2026/7）※分析の一部を抜粋。手法・全データはAppendix参照</a:t>
+              <a:t>スコア＝競合比の相対値（0が基準・正＝競合より強く独占）。出所：アライドアーキテクツ社 VOC分析（X上の生活者投稿、2025/8–2026/7）※分析の一部を抜粋。手法・全データはAppendix参照</a:t>
             </a:r>
             <a:endParaRPr lang="en-US" sz="900" dirty="0"/>
           </a:p>
@@ -45540,7 +45540,7 @@
                 <a:ea typeface="游ゴシック" pitchFamily="34" charset="-122"/>
                 <a:cs typeface="游ゴシック" pitchFamily="34" charset="-120"/>
               </a:rPr>
-              <a:t>出所：アライドアーキテクツ社 VOC分析（X上の生活者投稿、2025/8–2026/7）※分析の一部を抜粋。手法・全データはAppendix参照</a:t>
+              <a:t>スコア＝競合比の相対値（0が基準・正＝競合より強く独占）。出所：アライドアーキテクツ社 VOC分析（X上の生活者投稿、2025/8–2026/7）※分析の一部を抜粋。手法・全データはAppendix参照</a:t>
             </a:r>
             <a:endParaRPr lang="en-US" sz="900" dirty="0"/>
           </a:p>
@@ -47230,7 +47230,7 @@
                 <a:ea typeface="游ゴシック" pitchFamily="34" charset="-122"/>
                 <a:cs typeface="游ゴシック" pitchFamily="34" charset="-120"/>
               </a:rPr>
-              <a:t>出所：アライドアーキテクツ社 VOC分析（X上の生活者投稿、2025/8–2026/7）※分析の一部を抜粋。手法・全データはAppendix参照</a:t>
+              <a:t>スコア＝競合比の相対値（0が基準・正＝競合より強く独占）。出所：アライドアーキテクツ社 VOC分析（X上の生活者投稿、2025/8–2026/7）※分析の一部を抜粋。手法・全データはAppendix参照</a:t>
             </a:r>
             <a:endParaRPr lang="en-US" sz="900" dirty="0"/>
           </a:p>
